--- a/public/fun/pack/pptx/newspro/카드뉴스프리미엄_44_감사·칭찬_샴페인누아르.pptx
+++ b/public/fun/pack/pptx/newspro/카드뉴스프리미엄_44_감사·칭찬_샴페인누아르.pptx
@@ -113,12 +113,12 @@
   <p:extLst>
     <p:ext uri="{521415D9-36F7-43E2-AB2F-B90AF26B5E84}">
       <p14:sectionLst xmlns:p14="http://schemas.microsoft.com/office/powerpoint/2010/main">
-        <p14:section name="시작" id="{F9AF5F95-C9B0-4BF6-AE96-E6F4CC5CA8BB}">
+        <p14:section name="시작" id="{5E1C8942-11DD-44A8-9FFA-AE12662D3DB1}">
           <p14:sldIdLst>
             <p14:sldId id="256"/>
           </p14:sldIdLst>
         </p14:section>
-        <p14:section name="본문" id="{E5E1927A-72B8-4819-92C1-3AB7561D04C4}">
+        <p14:section name="본문" id="{D0314A38-EC75-443C-9FF9-236F9C25AF20}">
           <p14:sldIdLst>
             <p14:sldId id="257"/>
             <p14:sldId id="258"/>
@@ -127,7 +127,7 @@
             <p14:sldId id="261"/>
           </p14:sldIdLst>
         </p14:section>
-        <p14:section name="마무리" id="{7DB07739-106D-4A71-941C-BB6EA7316058}">
+        <p14:section name="마무리" id="{28C14B3B-1173-4AFF-9454-7A6148E1F266}">
           <p14:sldIdLst>
             <p14:sldId id="262"/>
           </p14:sldIdLst>
@@ -1513,7 +1513,7 @@
             </a:lvl1pPr>
           </a:lstStyle>
           <a:p>
-            <a:fld id="{E1BDF8A8-BA54-47A5-B9D4-99B5EA0E51A7}" type="slidenum">
+            <a:fld id="{444AB54A-7F33-4EBD-9C01-702A50A4D4A0}" type="slidenum">
               <a:rPr lang="en-US"/>
               <a:t>‹#›</a:t>
             </a:fld>
@@ -2239,7 +2239,7 @@
             </a:lvl1pPr>
           </a:lstStyle>
           <a:p>
-            <a:fld id="{37E94C65-9759-4514-9C1A-0E99C68386CE}" type="slidenum">
+            <a:fld id="{C64AB43A-1FD8-4D07-B446-4798F6810EB7}" type="slidenum">
               <a:rPr lang="en-US"/>
               <a:t>‹#›</a:t>
             </a:fld>
@@ -2992,7 +2992,7 @@
             </a:lvl1pPr>
           </a:lstStyle>
           <a:p>
-            <a:fld id="{7B45D3B9-B8C5-4EAC-A3A3-7195C3C28B40}" type="slidenum">
+            <a:fld id="{CE440414-894A-454B-85A6-98ABD120812B}" type="slidenum">
               <a:rPr lang="en-US"/>
               <a:t>‹#›</a:t>
             </a:fld>
@@ -3925,7 +3925,7 @@
           <a:p>
             <a:r>
               <a:rPr lang="ko-KR"/>
-              <a:t>올해 고마웠던 사람 떠올려 보기</a:t>
+              <a:t>고마웠던 사람 떠올려 보기</a:t>
             </a:r>
           </a:p>
         </p:txBody>
@@ -4054,7 +4054,7 @@
           <a:bodyPr/>
           <a:lstStyle/>
           <a:p>
-            <a:fld id="{B42DD187-0BAD-4A08-8E9A-10B52198B416}" type="slidenum">
+            <a:fld id="{A156D027-3E2B-49F4-8CAF-F7537FC8D322}" type="slidenum">
               <a:rPr lang="en-US"/>
               <a:t>‹#›</a:t>
             </a:fld>
@@ -4220,7 +4220,7 @@
           <a:bodyPr/>
           <a:lstStyle/>
           <a:p>
-            <a:fld id="{E9AA80E0-42E4-4383-9CF5-A3E5BDD8E501}" type="slidenum">
+            <a:fld id="{06F4A356-0891-41C5-8895-15681F6EBCF4}" type="slidenum">
               <a:rPr lang="en-US"/>
               <a:t>‹#›</a:t>
             </a:fld>
@@ -4386,7 +4386,7 @@
           <a:bodyPr/>
           <a:lstStyle/>
           <a:p>
-            <a:fld id="{244A6E14-ADC1-450E-AD2A-3FD4B0348D68}" type="slidenum">
+            <a:fld id="{6FD5C11C-4C8E-45BB-A38F-3382B6660406}" type="slidenum">
               <a:rPr lang="en-US"/>
               <a:t>‹#›</a:t>
             </a:fld>
@@ -4552,7 +4552,7 @@
           <a:bodyPr/>
           <a:lstStyle/>
           <a:p>
-            <a:fld id="{0017C07E-C010-4E7C-8A61-BA9465602183}" type="slidenum">
+            <a:fld id="{D53A742B-8931-4F4D-BD25-64281621F4A3}" type="slidenum">
               <a:rPr lang="en-US"/>
               <a:t>‹#›</a:t>
             </a:fld>
@@ -4718,7 +4718,7 @@
           <a:bodyPr/>
           <a:lstStyle/>
           <a:p>
-            <a:fld id="{7E29000C-C3D2-4BDB-BFD4-0924E802D6B3}" type="slidenum">
+            <a:fld id="{27DEE5AB-C537-46BD-966B-BE97626A64A6}" type="slidenum">
               <a:rPr lang="en-US"/>
               <a:t>‹#›</a:t>
             </a:fld>
